--- a/lectures/02_verilog_syntax/02_verilog_syntax.pptx
+++ b/lectures/02_verilog_syntax/02_verilog_syntax.pptx
@@ -5,7 +5,7 @@
     <p:sldMasterId id="2147483648" r:id="rId1"/>
   </p:sldMasterIdLst>
   <p:notesMasterIdLst>
-    <p:notesMasterId r:id="rId25"/>
+    <p:notesMasterId r:id="rId26"/>
   </p:notesMasterIdLst>
   <p:sldIdLst>
     <p:sldId id="256" r:id="rId2"/>
@@ -31,6 +31,7 @@
     <p:sldId id="312" r:id="rId22"/>
     <p:sldId id="314" r:id="rId23"/>
     <p:sldId id="316" r:id="rId24"/>
+    <p:sldId id="319" r:id="rId25"/>
   </p:sldIdLst>
   <p:sldSz cx="12192000" cy="6858000"/>
   <p:notesSz cx="6858000" cy="9144000"/>
@@ -219,7 +220,7 @@
           <a:p>
             <a:fld id="{C41E71E8-3C03-4698-8A5F-D437D8EB43BB}" type="datetimeFigureOut">
               <a:rPr lang="en-US" smtClean="0"/>
-              <a:t>9/21/2026</a:t>
+              <a:t>10/5/2026</a:t>
             </a:fld>
             <a:endParaRPr lang="en-US"/>
           </a:p>
@@ -921,7 +922,7 @@
           <a:p>
             <a:fld id="{BADB4DCA-CCFC-4F13-9F4C-80EFD7DB9911}" type="datetimeFigureOut">
               <a:rPr lang="en-US" smtClean="0"/>
-              <a:t>9/21/2026</a:t>
+              <a:t>10/5/2026</a:t>
             </a:fld>
             <a:endParaRPr lang="en-US"/>
           </a:p>
@@ -1119,7 +1120,7 @@
           <a:p>
             <a:fld id="{BADB4DCA-CCFC-4F13-9F4C-80EFD7DB9911}" type="datetimeFigureOut">
               <a:rPr lang="en-US" smtClean="0"/>
-              <a:t>9/21/2026</a:t>
+              <a:t>10/5/2026</a:t>
             </a:fld>
             <a:endParaRPr lang="en-US"/>
           </a:p>
@@ -1327,7 +1328,7 @@
           <a:p>
             <a:fld id="{BADB4DCA-CCFC-4F13-9F4C-80EFD7DB9911}" type="datetimeFigureOut">
               <a:rPr lang="en-US" smtClean="0"/>
-              <a:t>9/21/2026</a:t>
+              <a:t>10/5/2026</a:t>
             </a:fld>
             <a:endParaRPr lang="en-US"/>
           </a:p>
@@ -1555,7 +1556,7 @@
           <a:p>
             <a:fld id="{BADB4DCA-CCFC-4F13-9F4C-80EFD7DB9911}" type="datetimeFigureOut">
               <a:rPr lang="en-US" smtClean="0"/>
-              <a:t>9/21/2026</a:t>
+              <a:t>10/5/2026</a:t>
             </a:fld>
             <a:endParaRPr lang="en-US"/>
           </a:p>
@@ -1830,7 +1831,7 @@
           <a:p>
             <a:fld id="{BADB4DCA-CCFC-4F13-9F4C-80EFD7DB9911}" type="datetimeFigureOut">
               <a:rPr lang="en-US" smtClean="0"/>
-              <a:t>9/21/2026</a:t>
+              <a:t>10/5/2026</a:t>
             </a:fld>
             <a:endParaRPr lang="en-US"/>
           </a:p>
@@ -2095,7 +2096,7 @@
           <a:p>
             <a:fld id="{BADB4DCA-CCFC-4F13-9F4C-80EFD7DB9911}" type="datetimeFigureOut">
               <a:rPr lang="en-US" smtClean="0"/>
-              <a:t>9/21/2026</a:t>
+              <a:t>10/5/2026</a:t>
             </a:fld>
             <a:endParaRPr lang="en-US"/>
           </a:p>
@@ -2507,7 +2508,7 @@
           <a:p>
             <a:fld id="{BADB4DCA-CCFC-4F13-9F4C-80EFD7DB9911}" type="datetimeFigureOut">
               <a:rPr lang="en-US" smtClean="0"/>
-              <a:t>9/21/2026</a:t>
+              <a:t>10/5/2026</a:t>
             </a:fld>
             <a:endParaRPr lang="en-US"/>
           </a:p>
@@ -2648,7 +2649,7 @@
           <a:p>
             <a:fld id="{BADB4DCA-CCFC-4F13-9F4C-80EFD7DB9911}" type="datetimeFigureOut">
               <a:rPr lang="en-US" smtClean="0"/>
-              <a:t>9/21/2026</a:t>
+              <a:t>10/5/2026</a:t>
             </a:fld>
             <a:endParaRPr lang="en-US"/>
           </a:p>
@@ -2761,7 +2762,7 @@
           <a:p>
             <a:fld id="{BADB4DCA-CCFC-4F13-9F4C-80EFD7DB9911}" type="datetimeFigureOut">
               <a:rPr lang="en-US" smtClean="0"/>
-              <a:t>9/21/2026</a:t>
+              <a:t>10/5/2026</a:t>
             </a:fld>
             <a:endParaRPr lang="en-US"/>
           </a:p>
@@ -3072,7 +3073,7 @@
           <a:p>
             <a:fld id="{BADB4DCA-CCFC-4F13-9F4C-80EFD7DB9911}" type="datetimeFigureOut">
               <a:rPr lang="en-US" smtClean="0"/>
-              <a:t>9/21/2026</a:t>
+              <a:t>10/5/2026</a:t>
             </a:fld>
             <a:endParaRPr lang="en-US"/>
           </a:p>
@@ -3360,7 +3361,7 @@
           <a:p>
             <a:fld id="{BADB4DCA-CCFC-4F13-9F4C-80EFD7DB9911}" type="datetimeFigureOut">
               <a:rPr lang="en-US" smtClean="0"/>
-              <a:t>9/21/2026</a:t>
+              <a:t>10/5/2026</a:t>
             </a:fld>
             <a:endParaRPr lang="en-US"/>
           </a:p>
@@ -3601,7 +3602,7 @@
           <a:p>
             <a:fld id="{BADB4DCA-CCFC-4F13-9F4C-80EFD7DB9911}" type="datetimeFigureOut">
               <a:rPr lang="en-US" smtClean="0"/>
-              <a:t>9/21/2026</a:t>
+              <a:t>10/5/2026</a:t>
             </a:fld>
             <a:endParaRPr lang="en-US"/>
           </a:p>
@@ -14421,6 +14422,70 @@
     <p:extLst>
       <p:ext uri="{BB962C8B-B14F-4D97-AF65-F5344CB8AC3E}">
         <p14:creationId xmlns:p14="http://schemas.microsoft.com/office/powerpoint/2010/main" val="4249171735"/>
+      </p:ext>
+    </p:extLst>
+  </p:cSld>
+  <p:clrMapOvr>
+    <a:masterClrMapping/>
+  </p:clrMapOvr>
+</p:sld>
+</file>
+
+<file path=ppt/slides/slide24.xml><?xml version="1.0" encoding="utf-8"?>
+<p:sld xmlns:a="http://schemas.openxmlformats.org/drawingml/2006/main" xmlns:r="http://schemas.openxmlformats.org/officeDocument/2006/relationships" xmlns:p="http://schemas.openxmlformats.org/presentationml/2006/main">
+  <p:cSld>
+    <p:spTree>
+      <p:nvGrpSpPr>
+        <p:cNvPr id="1" name=""/>
+        <p:cNvGrpSpPr/>
+        <p:nvPr/>
+      </p:nvGrpSpPr>
+      <p:grpSpPr>
+        <a:xfrm>
+          <a:off x="0" y="0"/>
+          <a:ext cx="0" cy="0"/>
+          <a:chOff x="0" y="0"/>
+          <a:chExt cx="0" cy="0"/>
+        </a:xfrm>
+      </p:grpSpPr>
+      <p:sp>
+        <p:nvSpPr>
+          <p:cNvPr id="2" name="Title 1">
+            <a:extLst>
+              <a:ext uri="{FF2B5EF4-FFF2-40B4-BE49-F238E27FC236}">
+                <a16:creationId xmlns:a16="http://schemas.microsoft.com/office/drawing/2014/main" id="{9194084E-1F80-5D3F-6AE7-872ECD15CA63}"/>
+              </a:ext>
+            </a:extLst>
+          </p:cNvPr>
+          <p:cNvSpPr>
+            <a:spLocks noGrp="1"/>
+          </p:cNvSpPr>
+          <p:nvPr>
+            <p:ph type="title"/>
+          </p:nvPr>
+        </p:nvSpPr>
+        <p:spPr/>
+        <p:txBody>
+          <a:bodyPr>
+            <a:normAutofit/>
+          </a:bodyPr>
+          <a:lstStyle/>
+          <a:p>
+            <a:r>
+              <a:rPr lang="ru-RU" sz="3600" dirty="0"/>
+              <a:t>Избегайте непреднамеренного использования защелок (</a:t>
+            </a:r>
+            <a:r>
+              <a:rPr lang="en-US" sz="3600" dirty="0"/>
+              <a:t>latches)</a:t>
+            </a:r>
+          </a:p>
+        </p:txBody>
+      </p:sp>
+    </p:spTree>
+    <p:extLst>
+      <p:ext uri="{BB962C8B-B14F-4D97-AF65-F5344CB8AC3E}">
+        <p14:creationId xmlns:p14="http://schemas.microsoft.com/office/powerpoint/2010/main" val="3331334045"/>
       </p:ext>
     </p:extLst>
   </p:cSld>
